--- a/layout/요약본 레이아웃.pptx
+++ b/layout/요약본 레이아웃.pptx
@@ -113,6 +113,162 @@
     </p:ext>
   </p:extLst>
 </p:presentation>
+</file>
+
+<file path=ppt/changesInfos/changesInfo1.xml><?xml version="1.0" encoding="utf-8"?>
+<pc:chgInfo xmlns:a="http://schemas.openxmlformats.org/drawingml/2006/main" xmlns:r="http://schemas.openxmlformats.org/officeDocument/2006/relationships" xmlns:ac="http://schemas.microsoft.com/office/drawing/2013/main/command" xmlns:pc="http://schemas.microsoft.com/office/powerpoint/2013/main/command">
+  <pc:docChgLst>
+    <pc:chgData userId="deac549ad58e74e9" providerId="LiveId" clId="{9A1C5CB3-C32B-4F76-9B5A-79D195692619}"/>
+    <pc:docChg chg="undo custSel modSld">
+      <pc:chgData name="" userId="deac549ad58e74e9" providerId="LiveId" clId="{9A1C5CB3-C32B-4F76-9B5A-79D195692619}" dt="2026-08-10T06:36:38.033" v="203" actId="1076"/>
+      <pc:docMkLst>
+        <pc:docMk/>
+      </pc:docMkLst>
+      <pc:sldChg chg="modSp">
+        <pc:chgData name="" userId="deac549ad58e74e9" providerId="LiveId" clId="{9A1C5CB3-C32B-4F76-9B5A-79D195692619}" dt="2026-08-10T06:26:28.644" v="51" actId="20577"/>
+        <pc:sldMkLst>
+          <pc:docMk/>
+          <pc:sldMk cId="3290786611" sldId="262"/>
+        </pc:sldMkLst>
+        <pc:spChg chg="mod">
+          <ac:chgData name="" userId="deac549ad58e74e9" providerId="LiveId" clId="{9A1C5CB3-C32B-4F76-9B5A-79D195692619}" dt="2026-08-10T06:25:39.748" v="10" actId="20577"/>
+          <ac:spMkLst>
+            <pc:docMk/>
+            <pc:sldMk cId="3290786611" sldId="262"/>
+            <ac:spMk id="32" creationId="{EA96A542-644D-4A24-ADAE-724B9FD033EA}"/>
+          </ac:spMkLst>
+        </pc:spChg>
+        <pc:spChg chg="mod">
+          <ac:chgData name="" userId="deac549ad58e74e9" providerId="LiveId" clId="{9A1C5CB3-C32B-4F76-9B5A-79D195692619}" dt="2026-08-10T06:26:28.644" v="51" actId="20577"/>
+          <ac:spMkLst>
+            <pc:docMk/>
+            <pc:sldMk cId="3290786611" sldId="262"/>
+            <ac:spMk id="33" creationId="{C4A78911-7507-47CC-8DDD-37C0A8F35B32}"/>
+          </ac:spMkLst>
+        </pc:spChg>
+      </pc:sldChg>
+      <pc:sldChg chg="addSp delSp modSp">
+        <pc:chgData name="" userId="deac549ad58e74e9" providerId="LiveId" clId="{9A1C5CB3-C32B-4F76-9B5A-79D195692619}" dt="2026-08-10T06:36:38.033" v="203" actId="1076"/>
+        <pc:sldMkLst>
+          <pc:docMk/>
+          <pc:sldMk cId="1791971862" sldId="269"/>
+        </pc:sldMkLst>
+        <pc:spChg chg="add mod">
+          <ac:chgData name="" userId="deac549ad58e74e9" providerId="LiveId" clId="{9A1C5CB3-C32B-4F76-9B5A-79D195692619}" dt="2026-08-10T06:36:27.190" v="200" actId="1076"/>
+          <ac:spMkLst>
+            <pc:docMk/>
+            <pc:sldMk cId="1791971862" sldId="269"/>
+            <ac:spMk id="25" creationId="{F117CA2D-D2FC-4820-948D-082385DBD7E3}"/>
+          </ac:spMkLst>
+        </pc:spChg>
+        <pc:spChg chg="add mod">
+          <ac:chgData name="" userId="deac549ad58e74e9" providerId="LiveId" clId="{9A1C5CB3-C32B-4F76-9B5A-79D195692619}" dt="2026-08-10T06:36:38.033" v="203" actId="1076"/>
+          <ac:spMkLst>
+            <pc:docMk/>
+            <pc:sldMk cId="1791971862" sldId="269"/>
+            <ac:spMk id="32" creationId="{04A25A8B-B76B-46AB-B2C5-5EB6725C8E44}"/>
+          </ac:spMkLst>
+        </pc:spChg>
+        <pc:spChg chg="mod">
+          <ac:chgData name="" userId="deac549ad58e74e9" providerId="LiveId" clId="{9A1C5CB3-C32B-4F76-9B5A-79D195692619}" dt="2026-08-10T06:33:56.971" v="188" actId="20577"/>
+          <ac:spMkLst>
+            <pc:docMk/>
+            <pc:sldMk cId="1791971862" sldId="269"/>
+            <ac:spMk id="44" creationId="{CB6DCFB6-B3CC-47EA-99D6-7AFB1B33ED07}"/>
+          </ac:spMkLst>
+        </pc:spChg>
+        <pc:spChg chg="mod">
+          <ac:chgData name="" userId="deac549ad58e74e9" providerId="LiveId" clId="{9A1C5CB3-C32B-4F76-9B5A-79D195692619}" dt="2026-08-10T06:29:07.323" v="162" actId="14100"/>
+          <ac:spMkLst>
+            <pc:docMk/>
+            <pc:sldMk cId="1791971862" sldId="269"/>
+            <ac:spMk id="46" creationId="{69DC1874-428B-4C18-AE5E-9C395B10BD5C}"/>
+          </ac:spMkLst>
+        </pc:spChg>
+        <pc:spChg chg="mod">
+          <ac:chgData name="" userId="deac549ad58e74e9" providerId="LiveId" clId="{9A1C5CB3-C32B-4F76-9B5A-79D195692619}" dt="2026-08-10T06:36:27.190" v="200" actId="1076"/>
+          <ac:spMkLst>
+            <pc:docMk/>
+            <pc:sldMk cId="1791971862" sldId="269"/>
+            <ac:spMk id="48" creationId="{D96A902C-58D1-4D00-9ADE-A5557F0D0B0B}"/>
+          </ac:spMkLst>
+        </pc:spChg>
+        <pc:spChg chg="mod">
+          <ac:chgData name="" userId="deac549ad58e74e9" providerId="LiveId" clId="{9A1C5CB3-C32B-4F76-9B5A-79D195692619}" dt="2026-08-10T06:36:30.603" v="202" actId="1076"/>
+          <ac:spMkLst>
+            <pc:docMk/>
+            <pc:sldMk cId="1791971862" sldId="269"/>
+            <ac:spMk id="49" creationId="{98B31954-C8A0-41F3-BC57-D4C12283BEA4}"/>
+          </ac:spMkLst>
+        </pc:spChg>
+        <pc:spChg chg="mod">
+          <ac:chgData name="" userId="deac549ad58e74e9" providerId="LiveId" clId="{9A1C5CB3-C32B-4F76-9B5A-79D195692619}" dt="2026-08-10T06:36:27.190" v="200" actId="1076"/>
+          <ac:spMkLst>
+            <pc:docMk/>
+            <pc:sldMk cId="1791971862" sldId="269"/>
+            <ac:spMk id="50" creationId="{9A182597-EBD9-4385-B02A-CAFA83488202}"/>
+          </ac:spMkLst>
+        </pc:spChg>
+        <pc:spChg chg="del">
+          <ac:chgData name="" userId="deac549ad58e74e9" providerId="LiveId" clId="{9A1C5CB3-C32B-4F76-9B5A-79D195692619}" dt="2026-08-10T06:34:01.894" v="190" actId="478"/>
+          <ac:spMkLst>
+            <pc:docMk/>
+            <pc:sldMk cId="1791971862" sldId="269"/>
+            <ac:spMk id="51" creationId="{C172D9C5-E87C-41FE-8BEA-B34A5A1CCCC0}"/>
+          </ac:spMkLst>
+        </pc:spChg>
+        <pc:spChg chg="add del">
+          <ac:chgData name="" userId="deac549ad58e74e9" providerId="LiveId" clId="{9A1C5CB3-C32B-4F76-9B5A-79D195692619}" dt="2026-08-10T06:34:19.539" v="194" actId="478"/>
+          <ac:spMkLst>
+            <pc:docMk/>
+            <pc:sldMk cId="1791971862" sldId="269"/>
+            <ac:spMk id="58" creationId="{634B8AB3-04E7-46F6-B972-90B9EB9DCB58}"/>
+          </ac:spMkLst>
+        </pc:spChg>
+        <pc:grpChg chg="add mod">
+          <ac:chgData name="" userId="deac549ad58e74e9" providerId="LiveId" clId="{9A1C5CB3-C32B-4F76-9B5A-79D195692619}" dt="2026-08-10T06:36:27.190" v="200" actId="1076"/>
+          <ac:grpSpMkLst>
+            <pc:docMk/>
+            <pc:sldMk cId="1791971862" sldId="269"/>
+            <ac:grpSpMk id="26" creationId="{D2A3725E-061B-48C4-BC36-39BA366FF7CE}"/>
+          </ac:grpSpMkLst>
+        </pc:grpChg>
+        <pc:grpChg chg="add mod">
+          <ac:chgData name="" userId="deac549ad58e74e9" providerId="LiveId" clId="{9A1C5CB3-C32B-4F76-9B5A-79D195692619}" dt="2026-08-10T06:36:38.033" v="203" actId="1076"/>
+          <ac:grpSpMkLst>
+            <pc:docMk/>
+            <pc:sldMk cId="1791971862" sldId="269"/>
+            <ac:grpSpMk id="33" creationId="{1D623340-CF2D-4B45-83CB-9FEFBB2A3D49}"/>
+          </ac:grpSpMkLst>
+        </pc:grpChg>
+        <pc:grpChg chg="mod">
+          <ac:chgData name="" userId="deac549ad58e74e9" providerId="LiveId" clId="{9A1C5CB3-C32B-4F76-9B5A-79D195692619}" dt="2026-08-10T06:29:19.331" v="165" actId="12788"/>
+          <ac:grpSpMkLst>
+            <pc:docMk/>
+            <pc:sldMk cId="1791971862" sldId="269"/>
+            <ac:grpSpMk id="45" creationId="{D854F264-B996-4EF5-8ED3-D3FA4BED7453}"/>
+          </ac:grpSpMkLst>
+        </pc:grpChg>
+        <pc:grpChg chg="del">
+          <ac:chgData name="" userId="deac549ad58e74e9" providerId="LiveId" clId="{9A1C5CB3-C32B-4F76-9B5A-79D195692619}" dt="2026-08-10T06:34:00.403" v="189" actId="478"/>
+          <ac:grpSpMkLst>
+            <pc:docMk/>
+            <pc:sldMk cId="1791971862" sldId="269"/>
+            <ac:grpSpMk id="52" creationId="{C7012D84-0DD3-463D-AA04-A99E2F95BAB9}"/>
+          </ac:grpSpMkLst>
+        </pc:grpChg>
+        <pc:grpChg chg="del mod">
+          <ac:chgData name="" userId="deac549ad58e74e9" providerId="LiveId" clId="{9A1C5CB3-C32B-4F76-9B5A-79D195692619}" dt="2026-08-10T06:34:03.418" v="191" actId="478"/>
+          <ac:grpSpMkLst>
+            <pc:docMk/>
+            <pc:sldMk cId="1791971862" sldId="269"/>
+            <ac:grpSpMk id="59" creationId="{FFB73DBC-F907-40BA-8BDE-16FA97D6C374}"/>
+          </ac:grpSpMkLst>
+        </pc:grpChg>
+      </pc:sldChg>
+    </pc:docChg>
+  </pc:docChgLst>
+</pc:chgInfo>
 </file>
 
 <file path=ppt/slideLayouts/slideLayout1.xml><?xml version="1.0" encoding="utf-8"?>
@@ -246,7 +402,7 @@
           <a:p>
             <a:fld id="{62E3A85F-5A81-4A2C-ADB7-CB9A7B252CB6}" type="datetimeFigureOut">
               <a:rPr lang="ko-KR" altLang="en-US" smtClean="0"/>
-              <a:t>2026-02-26</a:t>
+              <a:t>2026-08-10</a:t>
             </a:fld>
             <a:endParaRPr lang="ko-KR" altLang="en-US"/>
           </a:p>
@@ -416,7 +572,7 @@
           <a:p>
             <a:fld id="{62E3A85F-5A81-4A2C-ADB7-CB9A7B252CB6}" type="datetimeFigureOut">
               <a:rPr lang="ko-KR" altLang="en-US" smtClean="0"/>
-              <a:t>2026-02-26</a:t>
+              <a:t>2026-08-10</a:t>
             </a:fld>
             <a:endParaRPr lang="ko-KR" altLang="en-US"/>
           </a:p>
@@ -596,7 +752,7 @@
           <a:p>
             <a:fld id="{62E3A85F-5A81-4A2C-ADB7-CB9A7B252CB6}" type="datetimeFigureOut">
               <a:rPr lang="ko-KR" altLang="en-US" smtClean="0"/>
-              <a:t>2026-02-26</a:t>
+              <a:t>2026-08-10</a:t>
             </a:fld>
             <a:endParaRPr lang="ko-KR" altLang="en-US"/>
           </a:p>
@@ -766,7 +922,7 @@
           <a:p>
             <a:fld id="{62E3A85F-5A81-4A2C-ADB7-CB9A7B252CB6}" type="datetimeFigureOut">
               <a:rPr lang="ko-KR" altLang="en-US" smtClean="0"/>
-              <a:t>2026-02-26</a:t>
+              <a:t>2026-08-10</a:t>
             </a:fld>
             <a:endParaRPr lang="ko-KR" altLang="en-US"/>
           </a:p>
@@ -1010,7 +1166,7 @@
           <a:p>
             <a:fld id="{62E3A85F-5A81-4A2C-ADB7-CB9A7B252CB6}" type="datetimeFigureOut">
               <a:rPr lang="ko-KR" altLang="en-US" smtClean="0"/>
-              <a:t>2026-02-26</a:t>
+              <a:t>2026-08-10</a:t>
             </a:fld>
             <a:endParaRPr lang="ko-KR" altLang="en-US"/>
           </a:p>
@@ -1242,7 +1398,7 @@
           <a:p>
             <a:fld id="{62E3A85F-5A81-4A2C-ADB7-CB9A7B252CB6}" type="datetimeFigureOut">
               <a:rPr lang="ko-KR" altLang="en-US" smtClean="0"/>
-              <a:t>2026-02-26</a:t>
+              <a:t>2026-08-10</a:t>
             </a:fld>
             <a:endParaRPr lang="ko-KR" altLang="en-US"/>
           </a:p>
@@ -1609,7 +1765,7 @@
           <a:p>
             <a:fld id="{62E3A85F-5A81-4A2C-ADB7-CB9A7B252CB6}" type="datetimeFigureOut">
               <a:rPr lang="ko-KR" altLang="en-US" smtClean="0"/>
-              <a:t>2026-02-26</a:t>
+              <a:t>2026-08-10</a:t>
             </a:fld>
             <a:endParaRPr lang="ko-KR" altLang="en-US"/>
           </a:p>
@@ -1727,7 +1883,7 @@
           <a:p>
             <a:fld id="{62E3A85F-5A81-4A2C-ADB7-CB9A7B252CB6}" type="datetimeFigureOut">
               <a:rPr lang="ko-KR" altLang="en-US" smtClean="0"/>
-              <a:t>2026-02-26</a:t>
+              <a:t>2026-08-10</a:t>
             </a:fld>
             <a:endParaRPr lang="ko-KR" altLang="en-US"/>
           </a:p>
@@ -1822,7 +1978,7 @@
           <a:p>
             <a:fld id="{62E3A85F-5A81-4A2C-ADB7-CB9A7B252CB6}" type="datetimeFigureOut">
               <a:rPr lang="ko-KR" altLang="en-US" smtClean="0"/>
-              <a:t>2026-02-26</a:t>
+              <a:t>2026-08-10</a:t>
             </a:fld>
             <a:endParaRPr lang="ko-KR" altLang="en-US"/>
           </a:p>
@@ -2099,7 +2255,7 @@
           <a:p>
             <a:fld id="{62E3A85F-5A81-4A2C-ADB7-CB9A7B252CB6}" type="datetimeFigureOut">
               <a:rPr lang="ko-KR" altLang="en-US" smtClean="0"/>
-              <a:t>2026-02-26</a:t>
+              <a:t>2026-08-10</a:t>
             </a:fld>
             <a:endParaRPr lang="ko-KR" altLang="en-US"/>
           </a:p>
@@ -2356,7 +2512,7 @@
           <a:p>
             <a:fld id="{62E3A85F-5A81-4A2C-ADB7-CB9A7B252CB6}" type="datetimeFigureOut">
               <a:rPr lang="ko-KR" altLang="en-US" smtClean="0"/>
-              <a:t>2026-02-26</a:t>
+              <a:t>2026-08-10</a:t>
             </a:fld>
             <a:endParaRPr lang="ko-KR" altLang="en-US"/>
           </a:p>
@@ -2569,7 +2725,7 @@
           <a:p>
             <a:fld id="{62E3A85F-5A81-4A2C-ADB7-CB9A7B252CB6}" type="datetimeFigureOut">
               <a:rPr lang="ko-KR" altLang="en-US" smtClean="0"/>
-              <a:t>2026-02-26</a:t>
+              <a:t>2026-08-10</a:t>
             </a:fld>
             <a:endParaRPr lang="ko-KR" altLang="en-US"/>
           </a:p>
@@ -3128,59 +3284,7 @@
                   <a:latin typeface="피플폰트 Bold" panose="020B0600000101010101" pitchFamily="50" charset="-127"/>
                   <a:ea typeface="피플폰트 Bold" panose="020B0600000101010101" pitchFamily="50" charset="-127"/>
                 </a:rPr>
-                <a:t>서울시 마포구 동교동 주상복합 신축사업</a:t>
-              </a:r>
-              <a:r>
-                <a:rPr lang="en-US" altLang="ko-KR" sz="1400" dirty="0">
-                  <a:solidFill>
-                    <a:schemeClr val="tx1">
-                      <a:lumMod val="65000"/>
-                      <a:lumOff val="35000"/>
-                    </a:schemeClr>
-                  </a:solidFill>
-                  <a:latin typeface="피플폰트 Bold" panose="020B0600000101010101" pitchFamily="50" charset="-127"/>
-                  <a:ea typeface="피플폰트 Bold" panose="020B0600000101010101" pitchFamily="50" charset="-127"/>
-                </a:rPr>
-                <a:t> </a:t>
-              </a:r>
-              <a:r>
-                <a:rPr lang="ko-KR" altLang="en-US" sz="1400" dirty="0">
-                  <a:solidFill>
-                    <a:schemeClr val="tx1">
-                      <a:lumMod val="65000"/>
-                      <a:lumOff val="35000"/>
-                    </a:schemeClr>
-                  </a:solidFill>
-                  <a:latin typeface="피플폰트 Bold" panose="020B0600000101010101" pitchFamily="50" charset="-127"/>
-                  <a:ea typeface="피플폰트 Bold" panose="020B0600000101010101" pitchFamily="50" charset="-127"/>
-                </a:rPr>
-                <a:t>담보대출 사모사채</a:t>
-              </a:r>
-              <a:r>
-                <a:rPr lang="en-US" altLang="ko-KR" sz="1400" dirty="0">
-                  <a:solidFill>
-                    <a:schemeClr val="tx1">
-                      <a:lumMod val="65000"/>
-                      <a:lumOff val="35000"/>
-                    </a:schemeClr>
-                  </a:solidFill>
-                  <a:latin typeface="피플폰트 Bold" panose="020B0600000101010101" pitchFamily="50" charset="-127"/>
-                  <a:ea typeface="피플폰트 Bold" panose="020B0600000101010101" pitchFamily="50" charset="-127"/>
-                </a:rPr>
-                <a:t> </a:t>
-              </a:r>
-              <a:r>
-                <a:rPr lang="ko-KR" altLang="en-US" sz="1400" dirty="0">
-                  <a:solidFill>
-                    <a:schemeClr val="tx1">
-                      <a:lumMod val="65000"/>
-                      <a:lumOff val="35000"/>
-                    </a:schemeClr>
-                  </a:solidFill>
-                  <a:latin typeface="피플폰트 Bold" panose="020B0600000101010101" pitchFamily="50" charset="-127"/>
-                  <a:ea typeface="피플폰트 Bold" panose="020B0600000101010101" pitchFamily="50" charset="-127"/>
-                </a:rPr>
-                <a:t>제안서</a:t>
+                <a:t>사업명</a:t>
               </a:r>
               <a:r>
                 <a:rPr lang="en-US" altLang="ko-KR" sz="1400" dirty="0">
@@ -3263,6 +3367,18 @@
             <a:lstStyle/>
             <a:p>
               <a:r>
+                <a:rPr lang="ko-KR" altLang="en-US" sz="900" dirty="0" err="1">
+                  <a:solidFill>
+                    <a:schemeClr val="bg1">
+                      <a:lumMod val="75000"/>
+                    </a:schemeClr>
+                  </a:solidFill>
+                  <a:latin typeface="피플폰트 Bold" panose="020B0600000101010101" pitchFamily="50" charset="-127"/>
+                  <a:ea typeface="피플폰트 Bold" panose="020B0600000101010101" pitchFamily="50" charset="-127"/>
+                </a:rPr>
+                <a:t>몇월</a:t>
+              </a:r>
+              <a:r>
                 <a:rPr lang="en-US" altLang="ko-KR" sz="900" dirty="0">
                   <a:solidFill>
                     <a:schemeClr val="bg1">
@@ -3272,7 +3388,55 @@
                   <a:latin typeface="피플폰트 Bold" panose="020B0600000101010101" pitchFamily="50" charset="-127"/>
                   <a:ea typeface="피플폰트 Bold" panose="020B0600000101010101" pitchFamily="50" charset="-127"/>
                 </a:rPr>
-                <a:t> February 2026</a:t>
+                <a:t>(</a:t>
+              </a:r>
+              <a:r>
+                <a:rPr lang="ko-KR" altLang="en-US" sz="900" dirty="0">
+                  <a:solidFill>
+                    <a:schemeClr val="bg1">
+                      <a:lumMod val="75000"/>
+                    </a:schemeClr>
+                  </a:solidFill>
+                  <a:latin typeface="피플폰트 Bold" panose="020B0600000101010101" pitchFamily="50" charset="-127"/>
+                  <a:ea typeface="피플폰트 Bold" panose="020B0600000101010101" pitchFamily="50" charset="-127"/>
+                </a:rPr>
+                <a:t>영어 표시</a:t>
+              </a:r>
+              <a:r>
+                <a:rPr lang="en-US" altLang="ko-KR" sz="900" dirty="0">
+                  <a:solidFill>
+                    <a:schemeClr val="bg1">
+                      <a:lumMod val="75000"/>
+                    </a:schemeClr>
+                  </a:solidFill>
+                  <a:latin typeface="피플폰트 Bold" panose="020B0600000101010101" pitchFamily="50" charset="-127"/>
+                  <a:ea typeface="피플폰트 Bold" panose="020B0600000101010101" pitchFamily="50" charset="-127"/>
+                </a:rPr>
+                <a:t>) </a:t>
+              </a:r>
+              <a:r>
+                <a:rPr lang="ko-KR" altLang="en-US" sz="900" dirty="0" err="1">
+                  <a:solidFill>
+                    <a:schemeClr val="bg1">
+                      <a:lumMod val="75000"/>
+                    </a:schemeClr>
+                  </a:solidFill>
+                  <a:latin typeface="피플폰트 Bold" panose="020B0600000101010101" pitchFamily="50" charset="-127"/>
+                  <a:ea typeface="피플폰트 Bold" panose="020B0600000101010101" pitchFamily="50" charset="-127"/>
+                </a:rPr>
+                <a:t>그해년도</a:t>
+              </a:r>
+              <a:r>
+                <a:rPr lang="en-US" altLang="ko-KR" sz="900" dirty="0">
+                  <a:solidFill>
+                    <a:schemeClr val="bg1">
+                      <a:lumMod val="75000"/>
+                    </a:schemeClr>
+                  </a:solidFill>
+                  <a:latin typeface="피플폰트 Bold" panose="020B0600000101010101" pitchFamily="50" charset="-127"/>
+                  <a:ea typeface="피플폰트 Bold" panose="020B0600000101010101" pitchFamily="50" charset="-127"/>
+                </a:rPr>
+                <a:t>(2026)</a:t>
               </a:r>
               <a:endParaRPr lang="ko-KR" altLang="en-US" sz="900" dirty="0">
                 <a:solidFill>
@@ -3681,27 +3845,7 @@
                 <a:latin typeface="피플폰트 Bold" panose="020B0600000101010101" pitchFamily="50" charset="-127"/>
                 <a:ea typeface="피플폰트 Bold" panose="020B0600000101010101" pitchFamily="50" charset="-127"/>
               </a:rPr>
-              <a:t>홍대입구역 </a:t>
-            </a:r>
-            <a:r>
-              <a:rPr lang="en-US" altLang="ko-KR" sz="1400" dirty="0">
-                <a:solidFill>
-                  <a:schemeClr val="accent5"/>
-                </a:solidFill>
-                <a:latin typeface="피플폰트 Bold" panose="020B0600000101010101" pitchFamily="50" charset="-127"/>
-                <a:ea typeface="피플폰트 Bold" panose="020B0600000101010101" pitchFamily="50" charset="-127"/>
-              </a:rPr>
-              <a:t>2</a:t>
-            </a:r>
-            <a:r>
-              <a:rPr lang="ko-KR" altLang="en-US" sz="1400" dirty="0">
-                <a:solidFill>
-                  <a:schemeClr val="accent5"/>
-                </a:solidFill>
-                <a:latin typeface="피플폰트 Bold" panose="020B0600000101010101" pitchFamily="50" charset="-127"/>
-                <a:ea typeface="피플폰트 Bold" panose="020B0600000101010101" pitchFamily="50" charset="-127"/>
-              </a:rPr>
-              <a:t>번 출구 인근 사업장</a:t>
+              <a:t>부제목</a:t>
             </a:r>
             <a:endParaRPr lang="en-US" altLang="ko-KR" sz="1400" dirty="0">
               <a:solidFill>
@@ -3727,10 +3871,10 @@
         </p:nvGrpSpPr>
         <p:grpSpPr>
           <a:xfrm>
-            <a:off x="3444234" y="784929"/>
-            <a:ext cx="3017533" cy="369812"/>
+            <a:off x="4259371" y="784929"/>
+            <a:ext cx="1387258" cy="369812"/>
             <a:chOff x="2323459" y="1248132"/>
-            <a:chExt cx="3017533" cy="369812"/>
+            <a:chExt cx="1387258" cy="369812"/>
           </a:xfrm>
         </p:grpSpPr>
         <p:sp>
@@ -3748,7 +3892,7 @@
           <p:spPr>
             <a:xfrm>
               <a:off x="2756270" y="1340945"/>
-              <a:ext cx="2584722" cy="276999"/>
+              <a:ext cx="954447" cy="276999"/>
             </a:xfrm>
             <a:prstGeom prst="rect">
               <a:avLst/>
@@ -3761,12 +3905,13 @@
             </a:bodyPr>
             <a:lstStyle/>
             <a:p>
+              <a:pPr algn="ctr"/>
               <a:r>
                 <a:rPr lang="ko-KR" altLang="en-US" dirty="0">
                   <a:latin typeface="피플폰트 Bold" panose="020B0600000101010101" pitchFamily="50" charset="-127"/>
                   <a:ea typeface="피플폰트 Bold" panose="020B0600000101010101" pitchFamily="50" charset="-127"/>
                 </a:rPr>
-                <a:t>우수한 입지의 개발 사업</a:t>
+                <a:t>제목</a:t>
               </a:r>
               <a:endParaRPr lang="en-US" altLang="ko-KR" dirty="0">
                 <a:latin typeface="피플폰트 Bold" panose="020B0600000101010101" pitchFamily="50" charset="-127"/>
@@ -3820,7 +3965,7 @@
         </p:nvSpPr>
         <p:spPr>
           <a:xfrm>
-            <a:off x="1187918" y="3403317"/>
+            <a:off x="1187918" y="3319849"/>
             <a:ext cx="7530164" cy="971045"/>
           </a:xfrm>
           <a:prstGeom prst="hexagon">
@@ -3877,7 +4022,7 @@
         </p:nvSpPr>
         <p:spPr>
           <a:xfrm>
-            <a:off x="1323500" y="3384529"/>
+            <a:off x="1323500" y="3301061"/>
             <a:ext cx="7258999" cy="1008622"/>
           </a:xfrm>
           <a:prstGeom prst="hexagon">
@@ -3931,7 +4076,7 @@
         </p:nvSpPr>
         <p:spPr>
           <a:xfrm>
-            <a:off x="1614746" y="3670258"/>
+            <a:off x="1614746" y="3586790"/>
             <a:ext cx="6338530" cy="430887"/>
           </a:xfrm>
           <a:prstGeom prst="rect">
@@ -4111,345 +4256,6 @@
           </a:p>
         </p:txBody>
       </p:sp>
-      <p:sp>
-        <p:nvSpPr>
-          <p:cNvPr id="51" name="TextBox 50">
-            <a:extLst>
-              <a:ext uri="{FF2B5EF4-FFF2-40B4-BE49-F238E27FC236}">
-                <a16:creationId xmlns:a16="http://schemas.microsoft.com/office/drawing/2014/main" id="{C172D9C5-E87C-41FE-8BEA-B34A5A1CCCC0}"/>
-              </a:ext>
-            </a:extLst>
-          </p:cNvPr>
-          <p:cNvSpPr txBox="1"/>
-          <p:nvPr/>
-        </p:nvSpPr>
-        <p:spPr>
-          <a:xfrm>
-            <a:off x="2712720" y="3033845"/>
-            <a:ext cx="4480560" cy="430887"/>
-          </a:xfrm>
-          <a:prstGeom prst="rect">
-            <a:avLst/>
-          </a:prstGeom>
-          <a:noFill/>
-        </p:spPr>
-        <p:txBody>
-          <a:bodyPr wrap="square" lIns="0" tIns="0" rIns="0" bIns="0" rtlCol="0">
-            <a:spAutoFit/>
-          </a:bodyPr>
-          <a:lstStyle/>
-          <a:p>
-            <a:pPr algn="ctr"/>
-            <a:r>
-              <a:rPr lang="ko-KR" altLang="en-US" sz="1400" dirty="0">
-                <a:solidFill>
-                  <a:schemeClr val="accent5"/>
-                </a:solidFill>
-                <a:latin typeface="피플폰트 Bold" panose="020B0600000101010101" pitchFamily="50" charset="-127"/>
-                <a:ea typeface="피플폰트 Bold" panose="020B0600000101010101" pitchFamily="50" charset="-127"/>
-              </a:rPr>
-              <a:t>차주 </a:t>
-            </a:r>
-            <a:r>
-              <a:rPr lang="en-US" altLang="ko-KR" sz="1400" dirty="0">
-                <a:solidFill>
-                  <a:schemeClr val="accent5"/>
-                </a:solidFill>
-                <a:latin typeface="피플폰트 Bold" panose="020B0600000101010101" pitchFamily="50" charset="-127"/>
-                <a:ea typeface="피플폰트 Bold" panose="020B0600000101010101" pitchFamily="50" charset="-127"/>
-              </a:rPr>
-              <a:t>: SY</a:t>
-            </a:r>
-            <a:r>
-              <a:rPr lang="ko-KR" altLang="en-US" sz="1400" dirty="0">
-                <a:solidFill>
-                  <a:schemeClr val="accent5"/>
-                </a:solidFill>
-                <a:latin typeface="피플폰트 Bold" panose="020B0600000101010101" pitchFamily="50" charset="-127"/>
-                <a:ea typeface="피플폰트 Bold" panose="020B0600000101010101" pitchFamily="50" charset="-127"/>
-              </a:rPr>
-              <a:t>신도시개발</a:t>
-            </a:r>
-            <a:r>
-              <a:rPr lang="en-US" altLang="ko-KR" sz="1400" dirty="0">
-                <a:solidFill>
-                  <a:schemeClr val="accent5"/>
-                </a:solidFill>
-                <a:latin typeface="피플폰트 Bold" panose="020B0600000101010101" pitchFamily="50" charset="-127"/>
-                <a:ea typeface="피플폰트 Bold" panose="020B0600000101010101" pitchFamily="50" charset="-127"/>
-              </a:rPr>
-              <a:t>(</a:t>
-            </a:r>
-            <a:r>
-              <a:rPr lang="ko-KR" altLang="en-US" sz="1400" dirty="0">
-                <a:solidFill>
-                  <a:schemeClr val="accent5"/>
-                </a:solidFill>
-                <a:latin typeface="피플폰트 Bold" panose="020B0600000101010101" pitchFamily="50" charset="-127"/>
-                <a:ea typeface="피플폰트 Bold" panose="020B0600000101010101" pitchFamily="50" charset="-127"/>
-              </a:rPr>
-              <a:t>신영 </a:t>
-            </a:r>
-            <a:r>
-              <a:rPr lang="en-US" altLang="ko-KR" sz="1400" dirty="0">
-                <a:solidFill>
-                  <a:schemeClr val="accent5"/>
-                </a:solidFill>
-                <a:latin typeface="피플폰트 Bold" panose="020B0600000101010101" pitchFamily="50" charset="-127"/>
-                <a:ea typeface="피플폰트 Bold" panose="020B0600000101010101" pitchFamily="50" charset="-127"/>
-              </a:rPr>
-              <a:t>100% </a:t>
-            </a:r>
-            <a:r>
-              <a:rPr lang="ko-KR" altLang="en-US" sz="1400" dirty="0" err="1">
-                <a:solidFill>
-                  <a:schemeClr val="accent5"/>
-                </a:solidFill>
-                <a:latin typeface="피플폰트 Bold" panose="020B0600000101010101" pitchFamily="50" charset="-127"/>
-                <a:ea typeface="피플폰트 Bold" panose="020B0600000101010101" pitchFamily="50" charset="-127"/>
-              </a:rPr>
-              <a:t>출자사</a:t>
-            </a:r>
-            <a:r>
-              <a:rPr lang="en-US" altLang="ko-KR" sz="1400" dirty="0">
-                <a:solidFill>
-                  <a:schemeClr val="accent5"/>
-                </a:solidFill>
-                <a:latin typeface="피플폰트 Bold" panose="020B0600000101010101" pitchFamily="50" charset="-127"/>
-                <a:ea typeface="피플폰트 Bold" panose="020B0600000101010101" pitchFamily="50" charset="-127"/>
-              </a:rPr>
-              <a:t>), </a:t>
-            </a:r>
-            <a:r>
-              <a:rPr lang="ko-KR" altLang="en-US" sz="1400" dirty="0">
-                <a:solidFill>
-                  <a:schemeClr val="accent5"/>
-                </a:solidFill>
-                <a:latin typeface="피플폰트 Bold" panose="020B0600000101010101" pitchFamily="50" charset="-127"/>
-                <a:ea typeface="피플폰트 Bold" panose="020B0600000101010101" pitchFamily="50" charset="-127"/>
-              </a:rPr>
-              <a:t>연대보증사 </a:t>
-            </a:r>
-            <a:r>
-              <a:rPr lang="en-US" altLang="ko-KR" sz="1400" dirty="0">
-                <a:solidFill>
-                  <a:schemeClr val="accent5"/>
-                </a:solidFill>
-                <a:latin typeface="피플폰트 Bold" panose="020B0600000101010101" pitchFamily="50" charset="-127"/>
-                <a:ea typeface="피플폰트 Bold" panose="020B0600000101010101" pitchFamily="50" charset="-127"/>
-              </a:rPr>
-              <a:t>: (</a:t>
-            </a:r>
-            <a:r>
-              <a:rPr lang="ko-KR" altLang="en-US" sz="1400" dirty="0">
-                <a:solidFill>
-                  <a:schemeClr val="accent5"/>
-                </a:solidFill>
-                <a:latin typeface="피플폰트 Bold" panose="020B0600000101010101" pitchFamily="50" charset="-127"/>
-                <a:ea typeface="피플폰트 Bold" panose="020B0600000101010101" pitchFamily="50" charset="-127"/>
-              </a:rPr>
-              <a:t>주</a:t>
-            </a:r>
-            <a:r>
-              <a:rPr lang="en-US" altLang="ko-KR" sz="1400" dirty="0">
-                <a:solidFill>
-                  <a:schemeClr val="accent5"/>
-                </a:solidFill>
-                <a:latin typeface="피플폰트 Bold" panose="020B0600000101010101" pitchFamily="50" charset="-127"/>
-                <a:ea typeface="피플폰트 Bold" panose="020B0600000101010101" pitchFamily="50" charset="-127"/>
-              </a:rPr>
-              <a:t>)</a:t>
-            </a:r>
-            <a:r>
-              <a:rPr lang="ko-KR" altLang="en-US" sz="1400" dirty="0">
-                <a:solidFill>
-                  <a:schemeClr val="accent5"/>
-                </a:solidFill>
-                <a:latin typeface="피플폰트 Bold" panose="020B0600000101010101" pitchFamily="50" charset="-127"/>
-                <a:ea typeface="피플폰트 Bold" panose="020B0600000101010101" pitchFamily="50" charset="-127"/>
-              </a:rPr>
-              <a:t>신영</a:t>
-            </a:r>
-            <a:endParaRPr lang="en-US" altLang="ko-KR" sz="1400" dirty="0">
-              <a:solidFill>
-                <a:schemeClr val="accent5"/>
-              </a:solidFill>
-              <a:latin typeface="피플폰트 Bold" panose="020B0600000101010101" pitchFamily="50" charset="-127"/>
-              <a:ea typeface="피플폰트 Bold" panose="020B0600000101010101" pitchFamily="50" charset="-127"/>
-            </a:endParaRPr>
-          </a:p>
-          <a:p>
-            <a:pPr algn="ctr"/>
-            <a:r>
-              <a:rPr lang="ko-KR" altLang="en-US" sz="1400" dirty="0">
-                <a:solidFill>
-                  <a:schemeClr val="accent5"/>
-                </a:solidFill>
-                <a:latin typeface="피플폰트 Bold" panose="020B0600000101010101" pitchFamily="50" charset="-127"/>
-                <a:ea typeface="피플폰트 Bold" panose="020B0600000101010101" pitchFamily="50" charset="-127"/>
-              </a:rPr>
-              <a:t>시공사 </a:t>
-            </a:r>
-            <a:r>
-              <a:rPr lang="en-US" altLang="ko-KR" sz="1400" dirty="0">
-                <a:solidFill>
-                  <a:schemeClr val="accent5"/>
-                </a:solidFill>
-                <a:latin typeface="피플폰트 Bold" panose="020B0600000101010101" pitchFamily="50" charset="-127"/>
-                <a:ea typeface="피플폰트 Bold" panose="020B0600000101010101" pitchFamily="50" charset="-127"/>
-              </a:rPr>
-              <a:t>: </a:t>
-            </a:r>
-            <a:r>
-              <a:rPr lang="ko-KR" altLang="en-US" sz="1400" dirty="0">
-                <a:solidFill>
-                  <a:schemeClr val="accent5"/>
-                </a:solidFill>
-                <a:latin typeface="피플폰트 Bold" panose="020B0600000101010101" pitchFamily="50" charset="-127"/>
-                <a:ea typeface="피플폰트 Bold" panose="020B0600000101010101" pitchFamily="50" charset="-127"/>
-              </a:rPr>
-              <a:t>동원건설산업</a:t>
-            </a:r>
-            <a:r>
-              <a:rPr lang="en-US" altLang="ko-KR" sz="1400" dirty="0">
-                <a:solidFill>
-                  <a:schemeClr val="accent5"/>
-                </a:solidFill>
-                <a:latin typeface="피플폰트 Bold" panose="020B0600000101010101" pitchFamily="50" charset="-127"/>
-                <a:ea typeface="피플폰트 Bold" panose="020B0600000101010101" pitchFamily="50" charset="-127"/>
-              </a:rPr>
-              <a:t>(</a:t>
-            </a:r>
-            <a:r>
-              <a:rPr lang="ko-KR" altLang="en-US" sz="1400" dirty="0">
-                <a:solidFill>
-                  <a:schemeClr val="accent5"/>
-                </a:solidFill>
-                <a:latin typeface="피플폰트 Bold" panose="020B0600000101010101" pitchFamily="50" charset="-127"/>
-                <a:ea typeface="피플폰트 Bold" panose="020B0600000101010101" pitchFamily="50" charset="-127"/>
-              </a:rPr>
-              <a:t>예정</a:t>
-            </a:r>
-            <a:r>
-              <a:rPr lang="en-US" altLang="ko-KR" sz="1400" dirty="0">
-                <a:solidFill>
-                  <a:schemeClr val="accent5"/>
-                </a:solidFill>
-                <a:latin typeface="피플폰트 Bold" panose="020B0600000101010101" pitchFamily="50" charset="-127"/>
-                <a:ea typeface="피플폰트 Bold" panose="020B0600000101010101" pitchFamily="50" charset="-127"/>
-              </a:rPr>
-              <a:t>)</a:t>
-            </a:r>
-          </a:p>
-        </p:txBody>
-      </p:sp>
-      <p:grpSp>
-        <p:nvGrpSpPr>
-          <p:cNvPr id="52" name="그룹 51">
-            <a:extLst>
-              <a:ext uri="{FF2B5EF4-FFF2-40B4-BE49-F238E27FC236}">
-                <a16:creationId xmlns:a16="http://schemas.microsoft.com/office/drawing/2014/main" id="{C7012D84-0DD3-463D-AA04-A99E2F95BAB9}"/>
-              </a:ext>
-            </a:extLst>
-          </p:cNvPr>
-          <p:cNvGrpSpPr/>
-          <p:nvPr/>
-        </p:nvGrpSpPr>
-        <p:grpSpPr>
-          <a:xfrm>
-            <a:off x="3444234" y="2592470"/>
-            <a:ext cx="3017533" cy="369332"/>
-            <a:chOff x="1940735" y="2964123"/>
-            <a:chExt cx="3017533" cy="369332"/>
-          </a:xfrm>
-        </p:grpSpPr>
-        <p:sp>
-          <p:nvSpPr>
-            <p:cNvPr id="53" name="TextBox 52">
-              <a:extLst>
-                <a:ext uri="{FF2B5EF4-FFF2-40B4-BE49-F238E27FC236}">
-                  <a16:creationId xmlns:a16="http://schemas.microsoft.com/office/drawing/2014/main" id="{C87042EC-6C87-4456-8C3C-59C6CDB031AE}"/>
-                </a:ext>
-              </a:extLst>
-            </p:cNvPr>
-            <p:cNvSpPr txBox="1"/>
-            <p:nvPr/>
-          </p:nvSpPr>
-          <p:spPr>
-            <a:xfrm>
-              <a:off x="2373546" y="3038294"/>
-              <a:ext cx="2584722" cy="276999"/>
-            </a:xfrm>
-            <a:prstGeom prst="rect">
-              <a:avLst/>
-            </a:prstGeom>
-            <a:noFill/>
-          </p:spPr>
-          <p:txBody>
-            <a:bodyPr wrap="square" lIns="0" tIns="0" rIns="0" bIns="0" rtlCol="0">
-              <a:spAutoFit/>
-            </a:bodyPr>
-            <a:lstStyle/>
-            <a:p>
-              <a:r>
-                <a:rPr lang="ko-KR" altLang="en-US" dirty="0">
-                  <a:latin typeface="피플폰트 Bold" panose="020B0600000101010101" pitchFamily="50" charset="-127"/>
-                  <a:ea typeface="피플폰트 Bold" panose="020B0600000101010101" pitchFamily="50" charset="-127"/>
-                </a:rPr>
-                <a:t>우량 시행 </a:t>
-              </a:r>
-              <a:r>
-                <a:rPr lang="en-US" altLang="ko-KR" dirty="0">
-                  <a:latin typeface="피플폰트 Bold" panose="020B0600000101010101" pitchFamily="50" charset="-127"/>
-                  <a:ea typeface="피플폰트 Bold" panose="020B0600000101010101" pitchFamily="50" charset="-127"/>
-                </a:rPr>
-                <a:t>/ </a:t>
-              </a:r>
-              <a:r>
-                <a:rPr lang="ko-KR" altLang="en-US" dirty="0">
-                  <a:latin typeface="피플폰트 Bold" panose="020B0600000101010101" pitchFamily="50" charset="-127"/>
-                  <a:ea typeface="피플폰트 Bold" panose="020B0600000101010101" pitchFamily="50" charset="-127"/>
-                </a:rPr>
-                <a:t>시공업체 사업장</a:t>
-              </a:r>
-              <a:endParaRPr lang="en-US" altLang="ko-KR" dirty="0">
-                <a:latin typeface="피플폰트 Bold" panose="020B0600000101010101" pitchFamily="50" charset="-127"/>
-                <a:ea typeface="피플폰트 Bold" panose="020B0600000101010101" pitchFamily="50" charset="-127"/>
-              </a:endParaRPr>
-            </a:p>
-          </p:txBody>
-        </p:sp>
-        <p:pic>
-          <p:nvPicPr>
-            <p:cNvPr id="54" name="Picture 5">
-              <a:extLst>
-                <a:ext uri="{FF2B5EF4-FFF2-40B4-BE49-F238E27FC236}">
-                  <a16:creationId xmlns:a16="http://schemas.microsoft.com/office/drawing/2014/main" id="{8F056911-6877-462A-AF12-9301918D14CF}"/>
-                </a:ext>
-              </a:extLst>
-            </p:cNvPr>
-            <p:cNvPicPr>
-              <a:picLocks noChangeAspect="1"/>
-            </p:cNvPicPr>
-            <p:nvPr/>
-          </p:nvPicPr>
-          <p:blipFill>
-            <a:blip r:embed="rId3"/>
-            <a:stretch>
-              <a:fillRect/>
-            </a:stretch>
-          </p:blipFill>
-          <p:spPr>
-            <a:xfrm>
-              <a:off x="1940735" y="2964123"/>
-              <a:ext cx="432811" cy="369332"/>
-            </a:xfrm>
-            <a:prstGeom prst="rect">
-              <a:avLst/>
-            </a:prstGeom>
-          </p:spPr>
-        </p:pic>
-      </p:grpSp>
       <p:sp>
         <p:nvSpPr>
           <p:cNvPr id="55" name="육각형 54">
@@ -5111,222 +4917,6 @@
       </p:sp>
       <p:sp>
         <p:nvSpPr>
-          <p:cNvPr id="58" name="TextBox 57">
-            <a:extLst>
-              <a:ext uri="{FF2B5EF4-FFF2-40B4-BE49-F238E27FC236}">
-                <a16:creationId xmlns:a16="http://schemas.microsoft.com/office/drawing/2014/main" id="{634B8AB3-04E7-46F6-B972-90B9EB9DCB58}"/>
-              </a:ext>
-            </a:extLst>
-          </p:cNvPr>
-          <p:cNvSpPr txBox="1"/>
-          <p:nvPr/>
-        </p:nvSpPr>
-        <p:spPr>
-          <a:xfrm>
-            <a:off x="2078728" y="4893594"/>
-            <a:ext cx="5748545" cy="215444"/>
-          </a:xfrm>
-          <a:prstGeom prst="rect">
-            <a:avLst/>
-          </a:prstGeom>
-          <a:noFill/>
-        </p:spPr>
-        <p:txBody>
-          <a:bodyPr wrap="square" lIns="0" tIns="0" rIns="0" bIns="0" rtlCol="0">
-            <a:spAutoFit/>
-          </a:bodyPr>
-          <a:lstStyle/>
-          <a:p>
-            <a:pPr algn="ctr"/>
-            <a:r>
-              <a:rPr lang="ko-KR" altLang="en-US" sz="1400" dirty="0">
-                <a:solidFill>
-                  <a:schemeClr val="accent5"/>
-                </a:solidFill>
-                <a:latin typeface="피플폰트 Bold" panose="020B0600000101010101" pitchFamily="50" charset="-127"/>
-                <a:ea typeface="피플폰트 Bold" panose="020B0600000101010101" pitchFamily="50" charset="-127"/>
-              </a:rPr>
-              <a:t>약 </a:t>
-            </a:r>
-            <a:r>
-              <a:rPr lang="en-US" altLang="ko-KR" sz="1400" dirty="0">
-                <a:solidFill>
-                  <a:schemeClr val="accent5"/>
-                </a:solidFill>
-                <a:latin typeface="피플폰트 Bold" panose="020B0600000101010101" pitchFamily="50" charset="-127"/>
-                <a:ea typeface="피플폰트 Bold" panose="020B0600000101010101" pitchFamily="50" charset="-127"/>
-              </a:rPr>
-              <a:t>12</a:t>
-            </a:r>
-            <a:r>
-              <a:rPr lang="ko-KR" altLang="en-US" sz="1400" dirty="0">
-                <a:solidFill>
-                  <a:schemeClr val="accent5"/>
-                </a:solidFill>
-                <a:latin typeface="피플폰트 Bold" panose="020B0600000101010101" pitchFamily="50" charset="-127"/>
-                <a:ea typeface="피플폰트 Bold" panose="020B0600000101010101" pitchFamily="50" charset="-127"/>
-              </a:rPr>
-              <a:t>개월의 짧은 잔존 만기</a:t>
-            </a:r>
-            <a:r>
-              <a:rPr lang="en-US" altLang="ko-KR" sz="1400" dirty="0">
-                <a:solidFill>
-                  <a:schemeClr val="accent5"/>
-                </a:solidFill>
-                <a:latin typeface="피플폰트 Bold" panose="020B0600000101010101" pitchFamily="50" charset="-127"/>
-                <a:ea typeface="피플폰트 Bold" panose="020B0600000101010101" pitchFamily="50" charset="-127"/>
-              </a:rPr>
-              <a:t>, </a:t>
-            </a:r>
-            <a:r>
-              <a:rPr lang="ko-KR" altLang="en-US" sz="1400" dirty="0">
-                <a:solidFill>
-                  <a:schemeClr val="accent5"/>
-                </a:solidFill>
-                <a:latin typeface="피플폰트 Bold" panose="020B0600000101010101" pitchFamily="50" charset="-127"/>
-                <a:ea typeface="피플폰트 Bold" panose="020B0600000101010101" pitchFamily="50" charset="-127"/>
-              </a:rPr>
-              <a:t>건축허가 완료 </a:t>
-            </a:r>
-            <a:r>
-              <a:rPr lang="en-US" altLang="ko-KR" sz="1400" dirty="0">
-                <a:solidFill>
-                  <a:schemeClr val="accent5"/>
-                </a:solidFill>
-                <a:latin typeface="피플폰트 Bold" panose="020B0600000101010101" pitchFamily="50" charset="-127"/>
-                <a:ea typeface="피플폰트 Bold" panose="020B0600000101010101" pitchFamily="50" charset="-127"/>
-              </a:rPr>
-              <a:t>/ </a:t>
-            </a:r>
-            <a:r>
-              <a:rPr lang="ko-KR" altLang="en-US" sz="1400" dirty="0">
-                <a:solidFill>
-                  <a:schemeClr val="accent5"/>
-                </a:solidFill>
-                <a:latin typeface="피플폰트 Bold" panose="020B0600000101010101" pitchFamily="50" charset="-127"/>
-                <a:ea typeface="피플폰트 Bold" panose="020B0600000101010101" pitchFamily="50" charset="-127"/>
-              </a:rPr>
-              <a:t>철거 완료</a:t>
-            </a:r>
-            <a:endParaRPr lang="en-US" altLang="ko-KR" sz="1400" dirty="0">
-              <a:solidFill>
-                <a:schemeClr val="accent5"/>
-              </a:solidFill>
-              <a:latin typeface="피플폰트 Bold" panose="020B0600000101010101" pitchFamily="50" charset="-127"/>
-              <a:ea typeface="피플폰트 Bold" panose="020B0600000101010101" pitchFamily="50" charset="-127"/>
-            </a:endParaRPr>
-          </a:p>
-        </p:txBody>
-      </p:sp>
-      <p:grpSp>
-        <p:nvGrpSpPr>
-          <p:cNvPr id="59" name="그룹 58">
-            <a:extLst>
-              <a:ext uri="{FF2B5EF4-FFF2-40B4-BE49-F238E27FC236}">
-                <a16:creationId xmlns:a16="http://schemas.microsoft.com/office/drawing/2014/main" id="{FFB73DBC-F907-40BA-8BDE-16FA97D6C374}"/>
-              </a:ext>
-            </a:extLst>
-          </p:cNvPr>
-          <p:cNvGrpSpPr/>
-          <p:nvPr/>
-        </p:nvGrpSpPr>
-        <p:grpSpPr>
-          <a:xfrm>
-            <a:off x="3444234" y="4443304"/>
-            <a:ext cx="3017533" cy="369332"/>
-            <a:chOff x="1940735" y="4619440"/>
-            <a:chExt cx="3017533" cy="369332"/>
-          </a:xfrm>
-        </p:grpSpPr>
-        <p:sp>
-          <p:nvSpPr>
-            <p:cNvPr id="60" name="TextBox 59">
-              <a:extLst>
-                <a:ext uri="{FF2B5EF4-FFF2-40B4-BE49-F238E27FC236}">
-                  <a16:creationId xmlns:a16="http://schemas.microsoft.com/office/drawing/2014/main" id="{4CD98CEA-9019-4D6A-BA51-3B21243D3D98}"/>
-                </a:ext>
-              </a:extLst>
-            </p:cNvPr>
-            <p:cNvSpPr txBox="1"/>
-            <p:nvPr/>
-          </p:nvSpPr>
-          <p:spPr>
-            <a:xfrm>
-              <a:off x="2373546" y="4693611"/>
-              <a:ext cx="2584722" cy="276999"/>
-            </a:xfrm>
-            <a:prstGeom prst="rect">
-              <a:avLst/>
-            </a:prstGeom>
-            <a:noFill/>
-          </p:spPr>
-          <p:txBody>
-            <a:bodyPr wrap="square" lIns="0" tIns="0" rIns="0" bIns="0" rtlCol="0">
-              <a:spAutoFit/>
-            </a:bodyPr>
-            <a:lstStyle/>
-            <a:p>
-              <a:r>
-                <a:rPr lang="ko-KR" altLang="en-US" dirty="0">
-                  <a:latin typeface="피플폰트 Bold" panose="020B0600000101010101" pitchFamily="50" charset="-127"/>
-                  <a:ea typeface="피플폰트 Bold" panose="020B0600000101010101" pitchFamily="50" charset="-127"/>
-                </a:rPr>
-                <a:t>짧은 잔존 만기 </a:t>
-              </a:r>
-              <a:r>
-                <a:rPr lang="en-US" altLang="ko-KR" dirty="0">
-                  <a:latin typeface="피플폰트 Bold" panose="020B0600000101010101" pitchFamily="50" charset="-127"/>
-                  <a:ea typeface="피플폰트 Bold" panose="020B0600000101010101" pitchFamily="50" charset="-127"/>
-                </a:rPr>
-                <a:t>/ </a:t>
-              </a:r>
-              <a:r>
-                <a:rPr lang="ko-KR" altLang="en-US" dirty="0">
-                  <a:latin typeface="피플폰트 Bold" panose="020B0600000101010101" pitchFamily="50" charset="-127"/>
-                  <a:ea typeface="피플폰트 Bold" panose="020B0600000101010101" pitchFamily="50" charset="-127"/>
-                </a:rPr>
-                <a:t>인허가 완료</a:t>
-              </a:r>
-              <a:endParaRPr lang="en-US" altLang="ko-KR" dirty="0">
-                <a:latin typeface="피플폰트 Bold" panose="020B0600000101010101" pitchFamily="50" charset="-127"/>
-                <a:ea typeface="피플폰트 Bold" panose="020B0600000101010101" pitchFamily="50" charset="-127"/>
-              </a:endParaRPr>
-            </a:p>
-          </p:txBody>
-        </p:sp>
-        <p:pic>
-          <p:nvPicPr>
-            <p:cNvPr id="61" name="Picture 5">
-              <a:extLst>
-                <a:ext uri="{FF2B5EF4-FFF2-40B4-BE49-F238E27FC236}">
-                  <a16:creationId xmlns:a16="http://schemas.microsoft.com/office/drawing/2014/main" id="{CD9F1F04-CA07-4175-9969-46FC1B058EC7}"/>
-                </a:ext>
-              </a:extLst>
-            </p:cNvPr>
-            <p:cNvPicPr>
-              <a:picLocks noChangeAspect="1"/>
-            </p:cNvPicPr>
-            <p:nvPr/>
-          </p:nvPicPr>
-          <p:blipFill>
-            <a:blip r:embed="rId3"/>
-            <a:stretch>
-              <a:fillRect/>
-            </a:stretch>
-          </p:blipFill>
-          <p:spPr>
-            <a:xfrm>
-              <a:off x="1940735" y="4619440"/>
-              <a:ext cx="432811" cy="369332"/>
-            </a:xfrm>
-            <a:prstGeom prst="rect">
-              <a:avLst/>
-            </a:prstGeom>
-          </p:spPr>
-        </p:pic>
-      </p:grpSp>
-      <p:sp>
-        <p:nvSpPr>
           <p:cNvPr id="62" name="TextBox 61">
             <a:extLst>
               <a:ext uri="{FF2B5EF4-FFF2-40B4-BE49-F238E27FC236}">
@@ -5555,6 +5145,292 @@
           </a:p>
         </p:txBody>
       </p:sp>
+      <p:sp>
+        <p:nvSpPr>
+          <p:cNvPr id="25" name="TextBox 24">
+            <a:extLst>
+              <a:ext uri="{FF2B5EF4-FFF2-40B4-BE49-F238E27FC236}">
+                <a16:creationId xmlns:a16="http://schemas.microsoft.com/office/drawing/2014/main" id="{F117CA2D-D2FC-4820-948D-082385DBD7E3}"/>
+              </a:ext>
+            </a:extLst>
+          </p:cNvPr>
+          <p:cNvSpPr txBox="1"/>
+          <p:nvPr/>
+        </p:nvSpPr>
+        <p:spPr>
+          <a:xfrm>
+            <a:off x="3772537" y="3066828"/>
+            <a:ext cx="2360925" cy="215444"/>
+          </a:xfrm>
+          <a:prstGeom prst="rect">
+            <a:avLst/>
+          </a:prstGeom>
+          <a:noFill/>
+        </p:spPr>
+        <p:txBody>
+          <a:bodyPr wrap="square" lIns="0" tIns="0" rIns="0" bIns="0" rtlCol="0">
+            <a:spAutoFit/>
+          </a:bodyPr>
+          <a:lstStyle/>
+          <a:p>
+            <a:pPr algn="ctr"/>
+            <a:r>
+              <a:rPr lang="ko-KR" altLang="en-US" sz="1400" dirty="0">
+                <a:solidFill>
+                  <a:schemeClr val="accent5"/>
+                </a:solidFill>
+                <a:latin typeface="피플폰트 Bold" panose="020B0600000101010101" pitchFamily="50" charset="-127"/>
+                <a:ea typeface="피플폰트 Bold" panose="020B0600000101010101" pitchFamily="50" charset="-127"/>
+              </a:rPr>
+              <a:t>부제목</a:t>
+            </a:r>
+            <a:endParaRPr lang="en-US" altLang="ko-KR" sz="1400" dirty="0">
+              <a:solidFill>
+                <a:schemeClr val="accent5"/>
+              </a:solidFill>
+              <a:latin typeface="피플폰트 Bold" panose="020B0600000101010101" pitchFamily="50" charset="-127"/>
+              <a:ea typeface="피플폰트 Bold" panose="020B0600000101010101" pitchFamily="50" charset="-127"/>
+            </a:endParaRPr>
+          </a:p>
+        </p:txBody>
+      </p:sp>
+      <p:grpSp>
+        <p:nvGrpSpPr>
+          <p:cNvPr id="26" name="그룹 25">
+            <a:extLst>
+              <a:ext uri="{FF2B5EF4-FFF2-40B4-BE49-F238E27FC236}">
+                <a16:creationId xmlns:a16="http://schemas.microsoft.com/office/drawing/2014/main" id="{D2A3725E-061B-48C4-BC36-39BA366FF7CE}"/>
+              </a:ext>
+            </a:extLst>
+          </p:cNvPr>
+          <p:cNvGrpSpPr/>
+          <p:nvPr/>
+        </p:nvGrpSpPr>
+        <p:grpSpPr>
+          <a:xfrm>
+            <a:off x="4259373" y="2609856"/>
+            <a:ext cx="1387258" cy="369812"/>
+            <a:chOff x="2323459" y="1248132"/>
+            <a:chExt cx="1387258" cy="369812"/>
+          </a:xfrm>
+        </p:grpSpPr>
+        <p:sp>
+          <p:nvSpPr>
+            <p:cNvPr id="27" name="TextBox 26">
+              <a:extLst>
+                <a:ext uri="{FF2B5EF4-FFF2-40B4-BE49-F238E27FC236}">
+                  <a16:creationId xmlns:a16="http://schemas.microsoft.com/office/drawing/2014/main" id="{011114AE-019A-49F2-8541-4846F5A7F48F}"/>
+                </a:ext>
+              </a:extLst>
+            </p:cNvPr>
+            <p:cNvSpPr txBox="1"/>
+            <p:nvPr/>
+          </p:nvSpPr>
+          <p:spPr>
+            <a:xfrm>
+              <a:off x="2756270" y="1340945"/>
+              <a:ext cx="954447" cy="276999"/>
+            </a:xfrm>
+            <a:prstGeom prst="rect">
+              <a:avLst/>
+            </a:prstGeom>
+            <a:noFill/>
+          </p:spPr>
+          <p:txBody>
+            <a:bodyPr wrap="square" lIns="0" tIns="0" rIns="0" bIns="0" rtlCol="0">
+              <a:spAutoFit/>
+            </a:bodyPr>
+            <a:lstStyle/>
+            <a:p>
+              <a:pPr algn="ctr"/>
+              <a:r>
+                <a:rPr lang="ko-KR" altLang="en-US" dirty="0">
+                  <a:latin typeface="피플폰트 Bold" panose="020B0600000101010101" pitchFamily="50" charset="-127"/>
+                  <a:ea typeface="피플폰트 Bold" panose="020B0600000101010101" pitchFamily="50" charset="-127"/>
+                </a:rPr>
+                <a:t>제목</a:t>
+              </a:r>
+              <a:endParaRPr lang="en-US" altLang="ko-KR" dirty="0">
+                <a:latin typeface="피플폰트 Bold" panose="020B0600000101010101" pitchFamily="50" charset="-127"/>
+                <a:ea typeface="피플폰트 Bold" panose="020B0600000101010101" pitchFamily="50" charset="-127"/>
+              </a:endParaRPr>
+            </a:p>
+          </p:txBody>
+        </p:sp>
+        <p:pic>
+          <p:nvPicPr>
+            <p:cNvPr id="28" name="Picture 5">
+              <a:extLst>
+                <a:ext uri="{FF2B5EF4-FFF2-40B4-BE49-F238E27FC236}">
+                  <a16:creationId xmlns:a16="http://schemas.microsoft.com/office/drawing/2014/main" id="{FC2140A4-20FC-48D1-A7F0-40D297A4BD7E}"/>
+                </a:ext>
+              </a:extLst>
+            </p:cNvPr>
+            <p:cNvPicPr>
+              <a:picLocks noChangeAspect="1"/>
+            </p:cNvPicPr>
+            <p:nvPr/>
+          </p:nvPicPr>
+          <p:blipFill>
+            <a:blip r:embed="rId3"/>
+            <a:stretch>
+              <a:fillRect/>
+            </a:stretch>
+          </p:blipFill>
+          <p:spPr>
+            <a:xfrm>
+              <a:off x="2323459" y="1248132"/>
+              <a:ext cx="432811" cy="369332"/>
+            </a:xfrm>
+            <a:prstGeom prst="rect">
+              <a:avLst/>
+            </a:prstGeom>
+          </p:spPr>
+        </p:pic>
+      </p:grpSp>
+      <p:sp>
+        <p:nvSpPr>
+          <p:cNvPr id="32" name="TextBox 31">
+            <a:extLst>
+              <a:ext uri="{FF2B5EF4-FFF2-40B4-BE49-F238E27FC236}">
+                <a16:creationId xmlns:a16="http://schemas.microsoft.com/office/drawing/2014/main" id="{04A25A8B-B76B-46AB-B2C5-5EB6725C8E44}"/>
+              </a:ext>
+            </a:extLst>
+          </p:cNvPr>
+          <p:cNvSpPr txBox="1"/>
+          <p:nvPr/>
+        </p:nvSpPr>
+        <p:spPr>
+          <a:xfrm>
+            <a:off x="3772535" y="4898379"/>
+            <a:ext cx="2360925" cy="215444"/>
+          </a:xfrm>
+          <a:prstGeom prst="rect">
+            <a:avLst/>
+          </a:prstGeom>
+          <a:noFill/>
+        </p:spPr>
+        <p:txBody>
+          <a:bodyPr wrap="square" lIns="0" tIns="0" rIns="0" bIns="0" rtlCol="0">
+            <a:spAutoFit/>
+          </a:bodyPr>
+          <a:lstStyle/>
+          <a:p>
+            <a:pPr algn="ctr"/>
+            <a:r>
+              <a:rPr lang="ko-KR" altLang="en-US" sz="1400" dirty="0">
+                <a:solidFill>
+                  <a:schemeClr val="accent5"/>
+                </a:solidFill>
+                <a:latin typeface="피플폰트 Bold" panose="020B0600000101010101" pitchFamily="50" charset="-127"/>
+                <a:ea typeface="피플폰트 Bold" panose="020B0600000101010101" pitchFamily="50" charset="-127"/>
+              </a:rPr>
+              <a:t>부제목</a:t>
+            </a:r>
+            <a:endParaRPr lang="en-US" altLang="ko-KR" sz="1400" dirty="0">
+              <a:solidFill>
+                <a:schemeClr val="accent5"/>
+              </a:solidFill>
+              <a:latin typeface="피플폰트 Bold" panose="020B0600000101010101" pitchFamily="50" charset="-127"/>
+              <a:ea typeface="피플폰트 Bold" panose="020B0600000101010101" pitchFamily="50" charset="-127"/>
+            </a:endParaRPr>
+          </a:p>
+        </p:txBody>
+      </p:sp>
+      <p:grpSp>
+        <p:nvGrpSpPr>
+          <p:cNvPr id="33" name="그룹 32">
+            <a:extLst>
+              <a:ext uri="{FF2B5EF4-FFF2-40B4-BE49-F238E27FC236}">
+                <a16:creationId xmlns:a16="http://schemas.microsoft.com/office/drawing/2014/main" id="{1D623340-CF2D-4B45-83CB-9FEFBB2A3D49}"/>
+              </a:ext>
+            </a:extLst>
+          </p:cNvPr>
+          <p:cNvGrpSpPr/>
+          <p:nvPr/>
+        </p:nvGrpSpPr>
+        <p:grpSpPr>
+          <a:xfrm>
+            <a:off x="4259371" y="4441407"/>
+            <a:ext cx="1387258" cy="369812"/>
+            <a:chOff x="2323459" y="1248132"/>
+            <a:chExt cx="1387258" cy="369812"/>
+          </a:xfrm>
+        </p:grpSpPr>
+        <p:sp>
+          <p:nvSpPr>
+            <p:cNvPr id="34" name="TextBox 33">
+              <a:extLst>
+                <a:ext uri="{FF2B5EF4-FFF2-40B4-BE49-F238E27FC236}">
+                  <a16:creationId xmlns:a16="http://schemas.microsoft.com/office/drawing/2014/main" id="{3BC0021A-C465-46FD-9CE8-790951B016F9}"/>
+                </a:ext>
+              </a:extLst>
+            </p:cNvPr>
+            <p:cNvSpPr txBox="1"/>
+            <p:nvPr/>
+          </p:nvSpPr>
+          <p:spPr>
+            <a:xfrm>
+              <a:off x="2756270" y="1340945"/>
+              <a:ext cx="954447" cy="276999"/>
+            </a:xfrm>
+            <a:prstGeom prst="rect">
+              <a:avLst/>
+            </a:prstGeom>
+            <a:noFill/>
+          </p:spPr>
+          <p:txBody>
+            <a:bodyPr wrap="square" lIns="0" tIns="0" rIns="0" bIns="0" rtlCol="0">
+              <a:spAutoFit/>
+            </a:bodyPr>
+            <a:lstStyle/>
+            <a:p>
+              <a:pPr algn="ctr"/>
+              <a:r>
+                <a:rPr lang="ko-KR" altLang="en-US" dirty="0">
+                  <a:latin typeface="피플폰트 Bold" panose="020B0600000101010101" pitchFamily="50" charset="-127"/>
+                  <a:ea typeface="피플폰트 Bold" panose="020B0600000101010101" pitchFamily="50" charset="-127"/>
+                </a:rPr>
+                <a:t>제목</a:t>
+              </a:r>
+              <a:endParaRPr lang="en-US" altLang="ko-KR" dirty="0">
+                <a:latin typeface="피플폰트 Bold" panose="020B0600000101010101" pitchFamily="50" charset="-127"/>
+                <a:ea typeface="피플폰트 Bold" panose="020B0600000101010101" pitchFamily="50" charset="-127"/>
+              </a:endParaRPr>
+            </a:p>
+          </p:txBody>
+        </p:sp>
+        <p:pic>
+          <p:nvPicPr>
+            <p:cNvPr id="35" name="Picture 5">
+              <a:extLst>
+                <a:ext uri="{FF2B5EF4-FFF2-40B4-BE49-F238E27FC236}">
+                  <a16:creationId xmlns:a16="http://schemas.microsoft.com/office/drawing/2014/main" id="{F3CDEA1C-315E-448D-AC22-D07233638C91}"/>
+                </a:ext>
+              </a:extLst>
+            </p:cNvPr>
+            <p:cNvPicPr>
+              <a:picLocks noChangeAspect="1"/>
+            </p:cNvPicPr>
+            <p:nvPr/>
+          </p:nvPicPr>
+          <p:blipFill>
+            <a:blip r:embed="rId3"/>
+            <a:stretch>
+              <a:fillRect/>
+            </a:stretch>
+          </p:blipFill>
+          <p:spPr>
+            <a:xfrm>
+              <a:off x="2323459" y="1248132"/>
+              <a:ext cx="432811" cy="369332"/>
+            </a:xfrm>
+            <a:prstGeom prst="rect">
+              <a:avLst/>
+            </a:prstGeom>
+          </p:spPr>
+        </p:pic>
+      </p:grpSp>
     </p:spTree>
     <p:extLst>
       <p:ext uri="{BB962C8B-B14F-4D97-AF65-F5344CB8AC3E}">
